--- a/Marketing Analytics Business Case.pptx
+++ b/Marketing Analytics Business Case.pptx
@@ -9932,7 +9932,7 @@
           <a:p>
             <a:fld id="{1E4130FF-60BC-4C0C-AEE3-7285F2A694C4}" type="datetimeFigureOut">
               <a:rPr lang="nb-NO" smtClean="0"/>
-              <a:t>18.04.2025</a:t>
+              <a:t>19.09.2025</a:t>
             </a:fld>
             <a:endParaRPr lang="nb-NO"/>
           </a:p>
@@ -10199,7 +10199,7 @@
           <a:p>
             <a:fld id="{1E4130FF-60BC-4C0C-AEE3-7285F2A694C4}" type="datetimeFigureOut">
               <a:rPr lang="nb-NO" smtClean="0"/>
-              <a:t>18.04.2025</a:t>
+              <a:t>19.09.2025</a:t>
             </a:fld>
             <a:endParaRPr lang="nb-NO"/>
           </a:p>
@@ -10430,7 +10430,7 @@
           <a:p>
             <a:fld id="{1E4130FF-60BC-4C0C-AEE3-7285F2A694C4}" type="datetimeFigureOut">
               <a:rPr lang="nb-NO" smtClean="0"/>
-              <a:t>18.04.2025</a:t>
+              <a:t>19.09.2025</a:t>
             </a:fld>
             <a:endParaRPr lang="nb-NO"/>
           </a:p>
@@ -10740,7 +10740,7 @@
           <a:p>
             <a:fld id="{1E4130FF-60BC-4C0C-AEE3-7285F2A694C4}" type="datetimeFigureOut">
               <a:rPr lang="nb-NO" smtClean="0"/>
-              <a:t>18.04.2025</a:t>
+              <a:t>19.09.2025</a:t>
             </a:fld>
             <a:endParaRPr lang="nb-NO"/>
           </a:p>
@@ -11213,7 +11213,7 @@
           <a:p>
             <a:fld id="{1E4130FF-60BC-4C0C-AEE3-7285F2A694C4}" type="datetimeFigureOut">
               <a:rPr lang="nb-NO" smtClean="0"/>
-              <a:t>18.04.2025</a:t>
+              <a:t>19.09.2025</a:t>
             </a:fld>
             <a:endParaRPr lang="nb-NO"/>
           </a:p>
@@ -11760,7 +11760,7 @@
           <a:p>
             <a:fld id="{1E4130FF-60BC-4C0C-AEE3-7285F2A694C4}" type="datetimeFigureOut">
               <a:rPr lang="nb-NO" smtClean="0"/>
-              <a:t>18.04.2025</a:t>
+              <a:t>19.09.2025</a:t>
             </a:fld>
             <a:endParaRPr lang="nb-NO"/>
           </a:p>
@@ -12534,7 +12534,7 @@
           <a:p>
             <a:fld id="{1E4130FF-60BC-4C0C-AEE3-7285F2A694C4}" type="datetimeFigureOut">
               <a:rPr lang="nb-NO" smtClean="0"/>
-              <a:t>18.04.2025</a:t>
+              <a:t>19.09.2025</a:t>
             </a:fld>
             <a:endParaRPr lang="nb-NO"/>
           </a:p>
@@ -12709,7 +12709,7 @@
           <a:p>
             <a:fld id="{1E4130FF-60BC-4C0C-AEE3-7285F2A694C4}" type="datetimeFigureOut">
               <a:rPr lang="nb-NO" smtClean="0"/>
-              <a:t>18.04.2025</a:t>
+              <a:t>19.09.2025</a:t>
             </a:fld>
             <a:endParaRPr lang="nb-NO"/>
           </a:p>
@@ -12932,7 +12932,7 @@
           <a:p>
             <a:fld id="{1E4130FF-60BC-4C0C-AEE3-7285F2A694C4}" type="datetimeFigureOut">
               <a:rPr lang="nb-NO" smtClean="0"/>
-              <a:t>18.04.2025</a:t>
+              <a:t>19.09.2025</a:t>
             </a:fld>
             <a:endParaRPr lang="nb-NO"/>
           </a:p>
@@ -13112,7 +13112,7 @@
           <a:p>
             <a:fld id="{1E4130FF-60BC-4C0C-AEE3-7285F2A694C4}" type="datetimeFigureOut">
               <a:rPr lang="nb-NO" smtClean="0"/>
-              <a:t>18.04.2025</a:t>
+              <a:t>19.09.2025</a:t>
             </a:fld>
             <a:endParaRPr lang="nb-NO"/>
           </a:p>
@@ -13401,7 +13401,7 @@
           <a:p>
             <a:fld id="{1E4130FF-60BC-4C0C-AEE3-7285F2A694C4}" type="datetimeFigureOut">
               <a:rPr lang="nb-NO" smtClean="0"/>
-              <a:t>18.04.2025</a:t>
+              <a:t>19.09.2025</a:t>
             </a:fld>
             <a:endParaRPr lang="nb-NO"/>
           </a:p>
@@ -13643,7 +13643,7 @@
           <a:p>
             <a:fld id="{1E4130FF-60BC-4C0C-AEE3-7285F2A694C4}" type="datetimeFigureOut">
               <a:rPr lang="nb-NO" smtClean="0"/>
-              <a:t>18.04.2025</a:t>
+              <a:t>19.09.2025</a:t>
             </a:fld>
             <a:endParaRPr lang="nb-NO"/>
           </a:p>
@@ -14022,7 +14022,7 @@
           <a:p>
             <a:fld id="{1E4130FF-60BC-4C0C-AEE3-7285F2A694C4}" type="datetimeFigureOut">
               <a:rPr lang="nb-NO" smtClean="0"/>
-              <a:t>18.04.2025</a:t>
+              <a:t>19.09.2025</a:t>
             </a:fld>
             <a:endParaRPr lang="nb-NO"/>
           </a:p>
@@ -14140,7 +14140,7 @@
           <a:p>
             <a:fld id="{1E4130FF-60BC-4C0C-AEE3-7285F2A694C4}" type="datetimeFigureOut">
               <a:rPr lang="nb-NO" smtClean="0"/>
-              <a:t>18.04.2025</a:t>
+              <a:t>19.09.2025</a:t>
             </a:fld>
             <a:endParaRPr lang="nb-NO"/>
           </a:p>
@@ -14235,7 +14235,7 @@
           <a:p>
             <a:fld id="{1E4130FF-60BC-4C0C-AEE3-7285F2A694C4}" type="datetimeFigureOut">
               <a:rPr lang="nb-NO" smtClean="0"/>
-              <a:t>18.04.2025</a:t>
+              <a:t>19.09.2025</a:t>
             </a:fld>
             <a:endParaRPr lang="nb-NO"/>
           </a:p>
@@ -14484,7 +14484,7 @@
           <a:p>
             <a:fld id="{1E4130FF-60BC-4C0C-AEE3-7285F2A694C4}" type="datetimeFigureOut">
               <a:rPr lang="nb-NO" smtClean="0"/>
-              <a:t>18.04.2025</a:t>
+              <a:t>19.09.2025</a:t>
             </a:fld>
             <a:endParaRPr lang="nb-NO"/>
           </a:p>
@@ -14741,7 +14741,7 @@
           <a:p>
             <a:fld id="{1E4130FF-60BC-4C0C-AEE3-7285F2A694C4}" type="datetimeFigureOut">
               <a:rPr lang="nb-NO" smtClean="0"/>
-              <a:t>18.04.2025</a:t>
+              <a:t>19.09.2025</a:t>
             </a:fld>
             <a:endParaRPr lang="nb-NO"/>
           </a:p>
@@ -14984,7 +14984,7 @@
           <a:p>
             <a:fld id="{1E4130FF-60BC-4C0C-AEE3-7285F2A694C4}" type="datetimeFigureOut">
               <a:rPr lang="nb-NO" smtClean="0"/>
-              <a:t>18.04.2025</a:t>
+              <a:t>19.09.2025</a:t>
             </a:fld>
             <a:endParaRPr lang="nb-NO"/>
           </a:p>
@@ -15653,8 +15653,11 @@
           <a:p>
             <a:r>
               <a:rPr lang="nb-NO" dirty="0"/>
-              <a:t>Arun Kumar Gupta</a:t>
+              <a:t>Ritu Permani</a:t>
             </a:r>
+          </a:p>
+          <a:p>
+            <a:endParaRPr lang="nb-NO" dirty="0"/>
           </a:p>
           <a:p>
             <a:endParaRPr lang="nb-NO" dirty="0"/>
